--- a/hafta3/2.pptx
+++ b/hafta3/2.pptx
@@ -132,7 +132,7 @@
   <pc:docChgLst>
     <pc:chgData name="kahraman kostas" userId="7e50b7f88a301451" providerId="LiveId" clId="{D29DB3F4-6A73-4688-B8FC-B3E2229DDA63}"/>
     <pc:docChg chg="custSel addSld delSld modSld">
-      <pc:chgData name="kahraman kostas" userId="7e50b7f88a301451" providerId="LiveId" clId="{D29DB3F4-6A73-4688-B8FC-B3E2229DDA63}" dt="2026-10-14T09:33:31.580" v="44" actId="14100"/>
+      <pc:chgData name="kahraman kostas" userId="7e50b7f88a301451" providerId="LiveId" clId="{D29DB3F4-6A73-4688-B8FC-B3E2229DDA63}" dt="2026-10-14T09:37:56.782" v="47" actId="14100"/>
       <pc:docMkLst>
         <pc:docMk/>
       </pc:docMkLst>
@@ -399,7 +399,7 @@
         </pc:sldMkLst>
       </pc:sldChg>
       <pc:sldChg chg="addSp delSp modSp new mod">
-        <pc:chgData name="kahraman kostas" userId="7e50b7f88a301451" providerId="LiveId" clId="{D29DB3F4-6A73-4688-B8FC-B3E2229DDA63}" dt="2026-10-14T09:26:47.583" v="34" actId="1076"/>
+        <pc:chgData name="kahraman kostas" userId="7e50b7f88a301451" providerId="LiveId" clId="{D29DB3F4-6A73-4688-B8FC-B3E2229DDA63}" dt="2026-10-14T09:37:56.782" v="47" actId="14100"/>
         <pc:sldMkLst>
           <pc:docMk/>
           <pc:sldMk cId="2318288103" sldId="284"/>
@@ -421,7 +421,7 @@
           </ac:spMkLst>
         </pc:spChg>
         <pc:picChg chg="add mod">
-          <ac:chgData name="kahraman kostas" userId="7e50b7f88a301451" providerId="LiveId" clId="{D29DB3F4-6A73-4688-B8FC-B3E2229DDA63}" dt="2026-10-14T09:23:22.624" v="21" actId="14100"/>
+          <ac:chgData name="kahraman kostas" userId="7e50b7f88a301451" providerId="LiveId" clId="{D29DB3F4-6A73-4688-B8FC-B3E2229DDA63}" dt="2026-10-14T09:37:49.538" v="45" actId="14100"/>
           <ac:picMkLst>
             <pc:docMk/>
             <pc:sldMk cId="2318288103" sldId="284"/>
@@ -429,7 +429,7 @@
           </ac:picMkLst>
         </pc:picChg>
         <pc:picChg chg="add mod">
-          <ac:chgData name="kahraman kostas" userId="7e50b7f88a301451" providerId="LiveId" clId="{D29DB3F4-6A73-4688-B8FC-B3E2229DDA63}" dt="2026-10-14T09:26:47.583" v="34" actId="1076"/>
+          <ac:chgData name="kahraman kostas" userId="7e50b7f88a301451" providerId="LiveId" clId="{D29DB3F4-6A73-4688-B8FC-B3E2229DDA63}" dt="2026-10-14T09:37:53.172" v="46" actId="1076"/>
           <ac:picMkLst>
             <pc:docMk/>
             <pc:sldMk cId="2318288103" sldId="284"/>
@@ -437,7 +437,7 @@
           </ac:picMkLst>
         </pc:picChg>
         <pc:picChg chg="add mod">
-          <ac:chgData name="kahraman kostas" userId="7e50b7f88a301451" providerId="LiveId" clId="{D29DB3F4-6A73-4688-B8FC-B3E2229DDA63}" dt="2026-10-14T09:26:43.846" v="33" actId="1076"/>
+          <ac:chgData name="kahraman kostas" userId="7e50b7f88a301451" providerId="LiveId" clId="{D29DB3F4-6A73-4688-B8FC-B3E2229DDA63}" dt="2026-10-14T09:37:56.782" v="47" actId="14100"/>
           <ac:picMkLst>
             <pc:docMk/>
             <pc:sldMk cId="2318288103" sldId="284"/>
@@ -4000,7 +4000,7 @@
         <p:spPr>
           <a:xfrm>
             <a:off x="0" y="-94615"/>
-            <a:ext cx="5448300" cy="2451735"/>
+            <a:ext cx="6349956" cy="2857480"/>
           </a:xfrm>
           <a:prstGeom prst="rect">
             <a:avLst/>
@@ -4035,7 +4035,7 @@
         </p:blipFill>
         <p:spPr>
           <a:xfrm>
-            <a:off x="5517429" y="1870884"/>
+            <a:off x="5291287" y="1949542"/>
             <a:ext cx="6674571" cy="2701115"/>
           </a:xfrm>
           <a:prstGeom prst="rect">
@@ -4071,8 +4071,8 @@
         </p:blipFill>
         <p:spPr>
           <a:xfrm>
-            <a:off x="0" y="2691531"/>
-            <a:ext cx="4166469" cy="4166469"/>
+            <a:off x="0" y="2394155"/>
+            <a:ext cx="4463845" cy="4463845"/>
           </a:xfrm>
           <a:prstGeom prst="rect">
             <a:avLst/>
